--- a/IEP/lesson5-using-linear-equations-IEP.pptx
+++ b/IEP/lesson5-using-linear-equations-IEP.pptx
@@ -3979,7 +3979,7 @@
                 <a:latin typeface="Segoe UI"/>
                 <a:cs typeface="Segoe UI"/>
               </a:rPr>
-              <a:t xml:space="preserve">Bell work, homework and the quiz are the same pages as the general lesson. Assign fewer items, allow notes and a calculator, and give extended time as the IEP lists.</a:t>
+              <a:t xml:space="preserve">The IEP pages have 3 answer choices, 6 homework and quiz questions, a reminder card and read-aloud. Allow notes and a calculator, and give extended time as the IEP lists.</a:t>
             </a:r>
             <a:endParaRPr lang="en-US" sz="1575" dirty="0"/>
           </a:p>

--- a/IEP/lesson5-using-linear-equations-IEP.pptx
+++ b/IEP/lesson5-using-linear-equations-IEP.pptx
@@ -2167,6 +2167,40 @@
           </a:p>
         </p:txBody>
       </p:sp>
+      <p:sp>
+        <p:nvSpPr>
+          <p:cNvPr id="11" name="Slide Number 11"/>
+          <p:cNvSpPr txBox="1"/>
+          <p:nvPr/>
+        </p:nvSpPr>
+        <p:spPr>
+          <a:xfrm>
+            <a:off x="11277295" y="6611112"/>
+            <a:ext cx="685800" cy="201168"/>
+          </a:xfrm>
+          <a:prstGeom prst="rect">
+            <a:avLst/>
+          </a:prstGeom>
+          <a:noFill/>
+        </p:spPr>
+        <p:txBody>
+          <a:bodyPr wrap="none" lIns="0" tIns="0" rIns="0" bIns="0" anchor="b">
+            <a:noAutofit/>
+          </a:bodyPr>
+          <a:lstStyle/>
+          <a:p>
+            <a:pPr algn="r"/>
+            <a:fld id="{5C1A6E0B-3B1F-4D5E-9C7A-2F4B8D6E1A90}" type="slidenum">
+              <a:rPr lang="en-US" sz="1200" dirty="0">
+                <a:solidFill>
+                  <a:srgbClr val="5F6272"/>
+                </a:solidFill>
+              </a:rPr>
+              <a:t>1</a:t>
+            </a:fld>
+          </a:p>
+        </p:txBody>
+      </p:sp>
     </p:spTree>
   </p:cSld>
   <p:clrMapOvr>
@@ -3942,6 +3976,40 @@
           </a:ln>
         </p:spPr>
       </p:cxnSp>
+      <p:sp>
+        <p:nvSpPr>
+          <p:cNvPr id="48" name="Slide Number 48"/>
+          <p:cNvSpPr txBox="1"/>
+          <p:nvPr/>
+        </p:nvSpPr>
+        <p:spPr>
+          <a:xfrm>
+            <a:off x="11277295" y="6611112"/>
+            <a:ext cx="685800" cy="201168"/>
+          </a:xfrm>
+          <a:prstGeom prst="rect">
+            <a:avLst/>
+          </a:prstGeom>
+          <a:noFill/>
+        </p:spPr>
+        <p:txBody>
+          <a:bodyPr wrap="none" lIns="0" tIns="0" rIns="0" bIns="0" anchor="b">
+            <a:noAutofit/>
+          </a:bodyPr>
+          <a:lstStyle/>
+          <a:p>
+            <a:pPr algn="r"/>
+            <a:fld id="{5C1A6E0B-3B1F-4D5E-9C7A-2F4B8D6E1A90}" type="slidenum">
+              <a:rPr lang="en-US" sz="1200" dirty="0">
+                <a:solidFill>
+                  <a:srgbClr val="5F6272"/>
+                </a:solidFill>
+              </a:rPr>
+              <a:t>10</a:t>
+            </a:fld>
+          </a:p>
+        </p:txBody>
+      </p:sp>
     </p:spTree>
   </p:cSld>
   <p:clrMapOvr>
@@ -6616,6 +6684,40 @@
           </a:ln>
         </p:spPr>
       </p:cxnSp>
+      <p:sp>
+        <p:nvSpPr>
+          <p:cNvPr id="53" name="Slide Number 53"/>
+          <p:cNvSpPr txBox="1"/>
+          <p:nvPr/>
+        </p:nvSpPr>
+        <p:spPr>
+          <a:xfrm>
+            <a:off x="11277295" y="6611112"/>
+            <a:ext cx="685800" cy="201168"/>
+          </a:xfrm>
+          <a:prstGeom prst="rect">
+            <a:avLst/>
+          </a:prstGeom>
+          <a:noFill/>
+        </p:spPr>
+        <p:txBody>
+          <a:bodyPr wrap="none" lIns="0" tIns="0" rIns="0" bIns="0" anchor="b">
+            <a:noAutofit/>
+          </a:bodyPr>
+          <a:lstStyle/>
+          <a:p>
+            <a:pPr algn="r"/>
+            <a:fld id="{5C1A6E0B-3B1F-4D5E-9C7A-2F4B8D6E1A90}" type="slidenum">
+              <a:rPr lang="en-US" sz="1200" dirty="0">
+                <a:solidFill>
+                  <a:srgbClr val="5F6272"/>
+                </a:solidFill>
+              </a:rPr>
+              <a:t>11</a:t>
+            </a:fld>
+          </a:p>
+        </p:txBody>
+      </p:sp>
     </p:spTree>
   </p:cSld>
   <p:clrMapOvr>
@@ -7717,6 +7819,40 @@
           </a:p>
         </p:txBody>
       </p:sp>
+      <p:sp>
+        <p:nvSpPr>
+          <p:cNvPr id="8" name="Slide Number 8"/>
+          <p:cNvSpPr txBox="1"/>
+          <p:nvPr/>
+        </p:nvSpPr>
+        <p:spPr>
+          <a:xfrm>
+            <a:off x="11277295" y="6611112"/>
+            <a:ext cx="685800" cy="201168"/>
+          </a:xfrm>
+          <a:prstGeom prst="rect">
+            <a:avLst/>
+          </a:prstGeom>
+          <a:noFill/>
+        </p:spPr>
+        <p:txBody>
+          <a:bodyPr wrap="none" lIns="0" tIns="0" rIns="0" bIns="0" anchor="b">
+            <a:noAutofit/>
+          </a:bodyPr>
+          <a:lstStyle/>
+          <a:p>
+            <a:pPr algn="r"/>
+            <a:fld id="{5C1A6E0B-3B1F-4D5E-9C7A-2F4B8D6E1A90}" type="slidenum">
+              <a:rPr lang="en-US" sz="1200" dirty="0">
+                <a:solidFill>
+                  <a:srgbClr val="5F6272"/>
+                </a:solidFill>
+              </a:rPr>
+              <a:t>12</a:t>
+            </a:fld>
+          </a:p>
+        </p:txBody>
+      </p:sp>
     </p:spTree>
   </p:cSld>
   <p:clrMapOvr>
@@ -8605,6 +8741,40 @@
           </a:p>
         </p:txBody>
       </p:sp>
+      <p:sp>
+        <p:nvSpPr>
+          <p:cNvPr id="13" name="Slide Number 13"/>
+          <p:cNvSpPr txBox="1"/>
+          <p:nvPr/>
+        </p:nvSpPr>
+        <p:spPr>
+          <a:xfrm>
+            <a:off x="11277295" y="6611112"/>
+            <a:ext cx="685800" cy="201168"/>
+          </a:xfrm>
+          <a:prstGeom prst="rect">
+            <a:avLst/>
+          </a:prstGeom>
+          <a:noFill/>
+        </p:spPr>
+        <p:txBody>
+          <a:bodyPr wrap="none" lIns="0" tIns="0" rIns="0" bIns="0" anchor="b">
+            <a:noAutofit/>
+          </a:bodyPr>
+          <a:lstStyle/>
+          <a:p>
+            <a:pPr algn="r"/>
+            <a:fld id="{5C1A6E0B-3B1F-4D5E-9C7A-2F4B8D6E1A90}" type="slidenum">
+              <a:rPr lang="en-US" sz="1200" dirty="0">
+                <a:solidFill>
+                  <a:srgbClr val="5F6272"/>
+                </a:solidFill>
+              </a:rPr>
+              <a:t>13</a:t>
+            </a:fld>
+          </a:p>
+        </p:txBody>
+      </p:sp>
     </p:spTree>
   </p:cSld>
   <p:clrMapOvr>
@@ -9314,6 +9484,40 @@
               <a:t xml:space="preserve">point (−3, 1), slope 2</a:t>
             </a:r>
             <a:endParaRPr lang="en-US" sz="2325" dirty="0"/>
+          </a:p>
+        </p:txBody>
+      </p:sp>
+      <p:sp>
+        <p:nvSpPr>
+          <p:cNvPr id="13" name="Slide Number 13"/>
+          <p:cNvSpPr txBox="1"/>
+          <p:nvPr/>
+        </p:nvSpPr>
+        <p:spPr>
+          <a:xfrm>
+            <a:off x="11277295" y="6611112"/>
+            <a:ext cx="685800" cy="201168"/>
+          </a:xfrm>
+          <a:prstGeom prst="rect">
+            <a:avLst/>
+          </a:prstGeom>
+          <a:noFill/>
+        </p:spPr>
+        <p:txBody>
+          <a:bodyPr wrap="none" lIns="0" tIns="0" rIns="0" bIns="0" anchor="b">
+            <a:noAutofit/>
+          </a:bodyPr>
+          <a:lstStyle/>
+          <a:p>
+            <a:pPr algn="r"/>
+            <a:fld id="{5C1A6E0B-3B1F-4D5E-9C7A-2F4B8D6E1A90}" type="slidenum">
+              <a:rPr lang="en-US" sz="1200" dirty="0">
+                <a:solidFill>
+                  <a:srgbClr val="5F6272"/>
+                </a:solidFill>
+              </a:rPr>
+              <a:t>14</a:t>
+            </a:fld>
           </a:p>
         </p:txBody>
       </p:sp>
@@ -9943,6 +10147,40 @@
           </a:p>
         </p:txBody>
       </p:sp>
+      <p:sp>
+        <p:nvSpPr>
+          <p:cNvPr id="6" name="Slide Number 6"/>
+          <p:cNvSpPr txBox="1"/>
+          <p:nvPr/>
+        </p:nvSpPr>
+        <p:spPr>
+          <a:xfrm>
+            <a:off x="11277295" y="6611112"/>
+            <a:ext cx="685800" cy="201168"/>
+          </a:xfrm>
+          <a:prstGeom prst="rect">
+            <a:avLst/>
+          </a:prstGeom>
+          <a:noFill/>
+        </p:spPr>
+        <p:txBody>
+          <a:bodyPr wrap="none" lIns="0" tIns="0" rIns="0" bIns="0" anchor="b">
+            <a:noAutofit/>
+          </a:bodyPr>
+          <a:lstStyle/>
+          <a:p>
+            <a:pPr algn="r"/>
+            <a:fld id="{5C1A6E0B-3B1F-4D5E-9C7A-2F4B8D6E1A90}" type="slidenum">
+              <a:rPr lang="en-US" sz="1200" dirty="0">
+                <a:solidFill>
+                  <a:srgbClr val="5F6272"/>
+                </a:solidFill>
+              </a:rPr>
+              <a:t>15</a:t>
+            </a:fld>
+          </a:p>
+        </p:txBody>
+      </p:sp>
     </p:spTree>
   </p:cSld>
   <p:clrMapOvr>
@@ -10814,6 +11052,40 @@
               <a:t xml:space="preserve">(2, 4)</a:t>
             </a:r>
             <a:endParaRPr lang="en-US" sz="2325" dirty="0"/>
+          </a:p>
+        </p:txBody>
+      </p:sp>
+      <p:sp>
+        <p:nvSpPr>
+          <p:cNvPr id="12" name="Slide Number 12"/>
+          <p:cNvSpPr txBox="1"/>
+          <p:nvPr/>
+        </p:nvSpPr>
+        <p:spPr>
+          <a:xfrm>
+            <a:off x="11277295" y="6611112"/>
+            <a:ext cx="685800" cy="201168"/>
+          </a:xfrm>
+          <a:prstGeom prst="rect">
+            <a:avLst/>
+          </a:prstGeom>
+          <a:noFill/>
+        </p:spPr>
+        <p:txBody>
+          <a:bodyPr wrap="none" lIns="0" tIns="0" rIns="0" bIns="0" anchor="b">
+            <a:noAutofit/>
+          </a:bodyPr>
+          <a:lstStyle/>
+          <a:p>
+            <a:pPr algn="r"/>
+            <a:fld id="{5C1A6E0B-3B1F-4D5E-9C7A-2F4B8D6E1A90}" type="slidenum">
+              <a:rPr lang="en-US" sz="1200" dirty="0">
+                <a:solidFill>
+                  <a:srgbClr val="5F6272"/>
+                </a:solidFill>
+              </a:rPr>
+              <a:t>2</a:t>
+            </a:fld>
           </a:p>
         </p:txBody>
       </p:sp>
@@ -12057,6 +12329,40 @@
           </a:p>
         </p:txBody>
       </p:sp>
+      <p:sp>
+        <p:nvSpPr>
+          <p:cNvPr id="12" name="Slide Number 12"/>
+          <p:cNvSpPr txBox="1"/>
+          <p:nvPr/>
+        </p:nvSpPr>
+        <p:spPr>
+          <a:xfrm>
+            <a:off x="11277295" y="6611112"/>
+            <a:ext cx="685800" cy="201168"/>
+          </a:xfrm>
+          <a:prstGeom prst="rect">
+            <a:avLst/>
+          </a:prstGeom>
+          <a:noFill/>
+        </p:spPr>
+        <p:txBody>
+          <a:bodyPr wrap="none" lIns="0" tIns="0" rIns="0" bIns="0" anchor="b">
+            <a:noAutofit/>
+          </a:bodyPr>
+          <a:lstStyle/>
+          <a:p>
+            <a:pPr algn="r"/>
+            <a:fld id="{5C1A6E0B-3B1F-4D5E-9C7A-2F4B8D6E1A90}" type="slidenum">
+              <a:rPr lang="en-US" sz="1200" dirty="0">
+                <a:solidFill>
+                  <a:srgbClr val="5F6272"/>
+                </a:solidFill>
+              </a:rPr>
+              <a:t>3</a:t>
+            </a:fld>
+          </a:p>
+        </p:txBody>
+      </p:sp>
     </p:spTree>
   </p:cSld>
   <p:clrMapOvr>
@@ -13407,6 +13713,40 @@
           </a:p>
         </p:txBody>
       </p:sp>
+      <p:sp>
+        <p:nvSpPr>
+          <p:cNvPr id="12" name="Slide Number 12"/>
+          <p:cNvSpPr txBox="1"/>
+          <p:nvPr/>
+        </p:nvSpPr>
+        <p:spPr>
+          <a:xfrm>
+            <a:off x="11277295" y="6611112"/>
+            <a:ext cx="685800" cy="201168"/>
+          </a:xfrm>
+          <a:prstGeom prst="rect">
+            <a:avLst/>
+          </a:prstGeom>
+          <a:noFill/>
+        </p:spPr>
+        <p:txBody>
+          <a:bodyPr wrap="none" lIns="0" tIns="0" rIns="0" bIns="0" anchor="b">
+            <a:noAutofit/>
+          </a:bodyPr>
+          <a:lstStyle/>
+          <a:p>
+            <a:pPr algn="r"/>
+            <a:fld id="{5C1A6E0B-3B1F-4D5E-9C7A-2F4B8D6E1A90}" type="slidenum">
+              <a:rPr lang="en-US" sz="1200" dirty="0">
+                <a:solidFill>
+                  <a:srgbClr val="5F6272"/>
+                </a:solidFill>
+              </a:rPr>
+              <a:t>4</a:t>
+            </a:fld>
+          </a:p>
+        </p:txBody>
+      </p:sp>
     </p:spTree>
   </p:cSld>
   <p:clrMapOvr>
@@ -15491,6 +15831,40 @@
           </a:p>
         </p:txBody>
       </p:sp>
+      <p:sp>
+        <p:nvSpPr>
+          <p:cNvPr id="28" name="Slide Number 28"/>
+          <p:cNvSpPr txBox="1"/>
+          <p:nvPr/>
+        </p:nvSpPr>
+        <p:spPr>
+          <a:xfrm>
+            <a:off x="11277295" y="6611112"/>
+            <a:ext cx="685800" cy="201168"/>
+          </a:xfrm>
+          <a:prstGeom prst="rect">
+            <a:avLst/>
+          </a:prstGeom>
+          <a:noFill/>
+        </p:spPr>
+        <p:txBody>
+          <a:bodyPr wrap="none" lIns="0" tIns="0" rIns="0" bIns="0" anchor="b">
+            <a:noAutofit/>
+          </a:bodyPr>
+          <a:lstStyle/>
+          <a:p>
+            <a:pPr algn="r"/>
+            <a:fld id="{5C1A6E0B-3B1F-4D5E-9C7A-2F4B8D6E1A90}" type="slidenum">
+              <a:rPr lang="en-US" sz="1200" dirty="0">
+                <a:solidFill>
+                  <a:srgbClr val="5F6272"/>
+                </a:solidFill>
+              </a:rPr>
+              <a:t>5</a:t>
+            </a:fld>
+          </a:p>
+        </p:txBody>
+      </p:sp>
     </p:spTree>
   </p:cSld>
   <p:clrMapOvr>
@@ -15953,6 +16327,40 @@
           </a:p>
         </p:txBody>
       </p:sp>
+      <p:sp>
+        <p:nvSpPr>
+          <p:cNvPr id="8" name="Slide Number 8"/>
+          <p:cNvSpPr txBox="1"/>
+          <p:nvPr/>
+        </p:nvSpPr>
+        <p:spPr>
+          <a:xfrm>
+            <a:off x="11277295" y="6611112"/>
+            <a:ext cx="685800" cy="201168"/>
+          </a:xfrm>
+          <a:prstGeom prst="rect">
+            <a:avLst/>
+          </a:prstGeom>
+          <a:noFill/>
+        </p:spPr>
+        <p:txBody>
+          <a:bodyPr wrap="none" lIns="0" tIns="0" rIns="0" bIns="0" anchor="b">
+            <a:noAutofit/>
+          </a:bodyPr>
+          <a:lstStyle/>
+          <a:p>
+            <a:pPr algn="r"/>
+            <a:fld id="{5C1A6E0B-3B1F-4D5E-9C7A-2F4B8D6E1A90}" type="slidenum">
+              <a:rPr lang="en-US" sz="1200" dirty="0">
+                <a:solidFill>
+                  <a:srgbClr val="5F6272"/>
+                </a:solidFill>
+              </a:rPr>
+              <a:t>6</a:t>
+            </a:fld>
+          </a:p>
+        </p:txBody>
+      </p:sp>
     </p:spTree>
   </p:cSld>
   <p:clrMapOvr>
@@ -17823,6 +18231,40 @@
           </a:ln>
         </p:spPr>
       </p:cxnSp>
+      <p:sp>
+        <p:nvSpPr>
+          <p:cNvPr id="54" name="Slide Number 54"/>
+          <p:cNvSpPr txBox="1"/>
+          <p:nvPr/>
+        </p:nvSpPr>
+        <p:spPr>
+          <a:xfrm>
+            <a:off x="11277295" y="6611112"/>
+            <a:ext cx="685800" cy="201168"/>
+          </a:xfrm>
+          <a:prstGeom prst="rect">
+            <a:avLst/>
+          </a:prstGeom>
+          <a:noFill/>
+        </p:spPr>
+        <p:txBody>
+          <a:bodyPr wrap="none" lIns="0" tIns="0" rIns="0" bIns="0" anchor="b">
+            <a:noAutofit/>
+          </a:bodyPr>
+          <a:lstStyle/>
+          <a:p>
+            <a:pPr algn="r"/>
+            <a:fld id="{5C1A6E0B-3B1F-4D5E-9C7A-2F4B8D6E1A90}" type="slidenum">
+              <a:rPr lang="en-US" sz="1200" dirty="0">
+                <a:solidFill>
+                  <a:srgbClr val="5F6272"/>
+                </a:solidFill>
+              </a:rPr>
+              <a:t>7</a:t>
+            </a:fld>
+          </a:p>
+        </p:txBody>
+      </p:sp>
     </p:spTree>
   </p:cSld>
   <p:clrMapOvr>
@@ -20680,6 +21122,40 @@
           </a:ln>
         </p:spPr>
       </p:cxnSp>
+      <p:sp>
+        <p:nvSpPr>
+          <p:cNvPr id="60" name="Slide Number 60"/>
+          <p:cNvSpPr txBox="1"/>
+          <p:nvPr/>
+        </p:nvSpPr>
+        <p:spPr>
+          <a:xfrm>
+            <a:off x="11277295" y="6611112"/>
+            <a:ext cx="685800" cy="201168"/>
+          </a:xfrm>
+          <a:prstGeom prst="rect">
+            <a:avLst/>
+          </a:prstGeom>
+          <a:noFill/>
+        </p:spPr>
+        <p:txBody>
+          <a:bodyPr wrap="none" lIns="0" tIns="0" rIns="0" bIns="0" anchor="b">
+            <a:noAutofit/>
+          </a:bodyPr>
+          <a:lstStyle/>
+          <a:p>
+            <a:pPr algn="r"/>
+            <a:fld id="{5C1A6E0B-3B1F-4D5E-9C7A-2F4B8D6E1A90}" type="slidenum">
+              <a:rPr lang="en-US" sz="1200" dirty="0">
+                <a:solidFill>
+                  <a:srgbClr val="5F6272"/>
+                </a:solidFill>
+              </a:rPr>
+              <a:t>8</a:t>
+            </a:fld>
+          </a:p>
+        </p:txBody>
+      </p:sp>
     </p:spTree>
   </p:cSld>
   <p:clrMapOvr>
@@ -23475,6 +23951,40 @@
           </a:ln>
         </p:spPr>
       </p:cxnSp>
+      <p:sp>
+        <p:nvSpPr>
+          <p:cNvPr id="52" name="Slide Number 52"/>
+          <p:cNvSpPr txBox="1"/>
+          <p:nvPr/>
+        </p:nvSpPr>
+        <p:spPr>
+          <a:xfrm>
+            <a:off x="11277295" y="6611112"/>
+            <a:ext cx="685800" cy="201168"/>
+          </a:xfrm>
+          <a:prstGeom prst="rect">
+            <a:avLst/>
+          </a:prstGeom>
+          <a:noFill/>
+        </p:spPr>
+        <p:txBody>
+          <a:bodyPr wrap="none" lIns="0" tIns="0" rIns="0" bIns="0" anchor="b">
+            <a:noAutofit/>
+          </a:bodyPr>
+          <a:lstStyle/>
+          <a:p>
+            <a:pPr algn="r"/>
+            <a:fld id="{5C1A6E0B-3B1F-4D5E-9C7A-2F4B8D6E1A90}" type="slidenum">
+              <a:rPr lang="en-US" sz="1200" dirty="0">
+                <a:solidFill>
+                  <a:srgbClr val="5F6272"/>
+                </a:solidFill>
+              </a:rPr>
+              <a:t>9</a:t>
+            </a:fld>
+          </a:p>
+        </p:txBody>
+      </p:sp>
     </p:spTree>
   </p:cSld>
   <p:clrMapOvr>
